--- a/Modern-Physics/lecture/02_Particle_Properties_of_Waves/l2.pptx
+++ b/Modern-Physics/lecture/02_Particle_Properties_of_Waves/l2.pptx
@@ -4,11 +4,15 @@
   <p:sldMasterIdLst>
     <p:sldMasterId id="2147483648" r:id="rId1"/>
   </p:sldMasterIdLst>
+  <p:notesMasterIdLst>
+    <p:notesMasterId r:id="rId7"/>
+  </p:notesMasterIdLst>
   <p:sldIdLst>
     <p:sldId id="256" r:id="rId2"/>
     <p:sldId id="257" r:id="rId3"/>
     <p:sldId id="258" r:id="rId4"/>
     <p:sldId id="259" r:id="rId5"/>
+    <p:sldId id="261" r:id="rId6"/>
   </p:sldIdLst>
   <p:sldSz cx="12192000" cy="6858000"/>
   <p:notesSz cx="6858000" cy="9144000"/>
@@ -107,7 +111,445 @@
       </a:defRPr>
     </a:lvl9pPr>
   </p:defaultTextStyle>
+  <p:extLst>
+    <p:ext uri="{EFAFB233-063F-42B5-8137-9DF3F51BA10A}">
+      <p15:sldGuideLst xmlns:p15="http://schemas.microsoft.com/office/powerpoint/2012/main"/>
+    </p:ext>
+  </p:extLst>
 </p:presentation>
+</file>
+
+<file path=ppt/notesMasters/notesMaster1.xml><?xml version="1.0" encoding="utf-8"?>
+<p:notesMaster xmlns:a="http://schemas.openxmlformats.org/drawingml/2006/main" xmlns:r="http://schemas.openxmlformats.org/officeDocument/2006/relationships" xmlns:p="http://schemas.openxmlformats.org/presentationml/2006/main">
+  <p:cSld>
+    <p:bg>
+      <p:bgRef idx="1001">
+        <a:schemeClr val="bg1"/>
+      </p:bgRef>
+    </p:bg>
+    <p:spTree>
+      <p:nvGrpSpPr>
+        <p:cNvPr id="1" name=""/>
+        <p:cNvGrpSpPr/>
+        <p:nvPr/>
+      </p:nvGrpSpPr>
+      <p:grpSpPr>
+        <a:xfrm>
+          <a:off x="0" y="0"/>
+          <a:ext cx="0" cy="0"/>
+          <a:chOff x="0" y="0"/>
+          <a:chExt cx="0" cy="0"/>
+        </a:xfrm>
+      </p:grpSpPr>
+      <p:sp>
+        <p:nvSpPr>
+          <p:cNvPr id="2" name="頁首版面配置區 1"/>
+          <p:cNvSpPr>
+            <a:spLocks noGrp="1"/>
+          </p:cNvSpPr>
+          <p:nvPr>
+            <p:ph type="hdr" sz="quarter"/>
+          </p:nvPr>
+        </p:nvSpPr>
+        <p:spPr>
+          <a:xfrm>
+            <a:off x="0" y="0"/>
+            <a:ext cx="2971800" cy="458788"/>
+          </a:xfrm>
+          <a:prstGeom prst="rect">
+            <a:avLst/>
+          </a:prstGeom>
+        </p:spPr>
+        <p:txBody>
+          <a:bodyPr vert="horz" lIns="91440" tIns="45720" rIns="91440" bIns="45720" rtlCol="0"/>
+          <a:lstStyle>
+            <a:lvl1pPr algn="l">
+              <a:defRPr sz="1200"/>
+            </a:lvl1pPr>
+          </a:lstStyle>
+          <a:p>
+            <a:endParaRPr lang="zh-TW" altLang="en-US"/>
+          </a:p>
+        </p:txBody>
+      </p:sp>
+      <p:sp>
+        <p:nvSpPr>
+          <p:cNvPr id="3" name="日期版面配置區 2"/>
+          <p:cNvSpPr>
+            <a:spLocks noGrp="1"/>
+          </p:cNvSpPr>
+          <p:nvPr>
+            <p:ph type="dt" idx="1"/>
+          </p:nvPr>
+        </p:nvSpPr>
+        <p:spPr>
+          <a:xfrm>
+            <a:off x="3884613" y="0"/>
+            <a:ext cx="2971800" cy="458788"/>
+          </a:xfrm>
+          <a:prstGeom prst="rect">
+            <a:avLst/>
+          </a:prstGeom>
+        </p:spPr>
+        <p:txBody>
+          <a:bodyPr vert="horz" lIns="91440" tIns="45720" rIns="91440" bIns="45720" rtlCol="0"/>
+          <a:lstStyle>
+            <a:lvl1pPr algn="r">
+              <a:defRPr sz="1200"/>
+            </a:lvl1pPr>
+          </a:lstStyle>
+          <a:p>
+            <a:fld id="{E5AEFC37-9620-43DE-917B-8592171B3A61}" type="datetimeFigureOut">
+              <a:rPr lang="zh-TW" altLang="en-US" smtClean="0"/>
+              <a:t>2026/4/6</a:t>
+            </a:fld>
+            <a:endParaRPr lang="zh-TW" altLang="en-US"/>
+          </a:p>
+        </p:txBody>
+      </p:sp>
+      <p:sp>
+        <p:nvSpPr>
+          <p:cNvPr id="4" name="投影片影像版面配置區 3"/>
+          <p:cNvSpPr>
+            <a:spLocks noGrp="1" noRot="1" noChangeAspect="1"/>
+          </p:cNvSpPr>
+          <p:nvPr>
+            <p:ph type="sldImg" idx="2"/>
+          </p:nvPr>
+        </p:nvSpPr>
+        <p:spPr>
+          <a:xfrm>
+            <a:off x="685800" y="1143000"/>
+            <a:ext cx="5486400" cy="3086100"/>
+          </a:xfrm>
+          <a:prstGeom prst="rect">
+            <a:avLst/>
+          </a:prstGeom>
+          <a:noFill/>
+          <a:ln w="12700">
+            <a:solidFill>
+              <a:prstClr val="black"/>
+            </a:solidFill>
+          </a:ln>
+        </p:spPr>
+        <p:txBody>
+          <a:bodyPr vert="horz" lIns="91440" tIns="45720" rIns="91440" bIns="45720" rtlCol="0" anchor="ctr"/>
+          <a:lstStyle/>
+          <a:p>
+            <a:endParaRPr lang="zh-TW" altLang="en-US"/>
+          </a:p>
+        </p:txBody>
+      </p:sp>
+      <p:sp>
+        <p:nvSpPr>
+          <p:cNvPr id="5" name="備忘稿版面配置區 4"/>
+          <p:cNvSpPr>
+            <a:spLocks noGrp="1"/>
+          </p:cNvSpPr>
+          <p:nvPr>
+            <p:ph type="body" sz="quarter" idx="3"/>
+          </p:nvPr>
+        </p:nvSpPr>
+        <p:spPr>
+          <a:xfrm>
+            <a:off x="685800" y="4400550"/>
+            <a:ext cx="5486400" cy="3600450"/>
+          </a:xfrm>
+          <a:prstGeom prst="rect">
+            <a:avLst/>
+          </a:prstGeom>
+        </p:spPr>
+        <p:txBody>
+          <a:bodyPr vert="horz" lIns="91440" tIns="45720" rIns="91440" bIns="45720" rtlCol="0"/>
+          <a:lstStyle/>
+          <a:p>
+            <a:pPr lvl="0"/>
+            <a:r>
+              <a:rPr lang="zh-TW" altLang="en-US"/>
+              <a:t>按一下以編輯母片文字樣式</a:t>
+            </a:r>
+          </a:p>
+          <a:p>
+            <a:pPr lvl="1"/>
+            <a:r>
+              <a:rPr lang="zh-TW" altLang="en-US"/>
+              <a:t>第二層</a:t>
+            </a:r>
+          </a:p>
+          <a:p>
+            <a:pPr lvl="2"/>
+            <a:r>
+              <a:rPr lang="zh-TW" altLang="en-US"/>
+              <a:t>第三層</a:t>
+            </a:r>
+          </a:p>
+          <a:p>
+            <a:pPr lvl="3"/>
+            <a:r>
+              <a:rPr lang="zh-TW" altLang="en-US"/>
+              <a:t>第四層</a:t>
+            </a:r>
+          </a:p>
+          <a:p>
+            <a:pPr lvl="4"/>
+            <a:r>
+              <a:rPr lang="zh-TW" altLang="en-US"/>
+              <a:t>第五層</a:t>
+            </a:r>
+          </a:p>
+        </p:txBody>
+      </p:sp>
+      <p:sp>
+        <p:nvSpPr>
+          <p:cNvPr id="6" name="頁尾版面配置區 5"/>
+          <p:cNvSpPr>
+            <a:spLocks noGrp="1"/>
+          </p:cNvSpPr>
+          <p:nvPr>
+            <p:ph type="ftr" sz="quarter" idx="4"/>
+          </p:nvPr>
+        </p:nvSpPr>
+        <p:spPr>
+          <a:xfrm>
+            <a:off x="0" y="8685213"/>
+            <a:ext cx="2971800" cy="458787"/>
+          </a:xfrm>
+          <a:prstGeom prst="rect">
+            <a:avLst/>
+          </a:prstGeom>
+        </p:spPr>
+        <p:txBody>
+          <a:bodyPr vert="horz" lIns="91440" tIns="45720" rIns="91440" bIns="45720" rtlCol="0" anchor="b"/>
+          <a:lstStyle>
+            <a:lvl1pPr algn="l">
+              <a:defRPr sz="1200"/>
+            </a:lvl1pPr>
+          </a:lstStyle>
+          <a:p>
+            <a:endParaRPr lang="zh-TW" altLang="en-US"/>
+          </a:p>
+        </p:txBody>
+      </p:sp>
+      <p:sp>
+        <p:nvSpPr>
+          <p:cNvPr id="7" name="投影片編號版面配置區 6"/>
+          <p:cNvSpPr>
+            <a:spLocks noGrp="1"/>
+          </p:cNvSpPr>
+          <p:nvPr>
+            <p:ph type="sldNum" sz="quarter" idx="5"/>
+          </p:nvPr>
+        </p:nvSpPr>
+        <p:spPr>
+          <a:xfrm>
+            <a:off x="3884613" y="8685213"/>
+            <a:ext cx="2971800" cy="458787"/>
+          </a:xfrm>
+          <a:prstGeom prst="rect">
+            <a:avLst/>
+          </a:prstGeom>
+        </p:spPr>
+        <p:txBody>
+          <a:bodyPr vert="horz" lIns="91440" tIns="45720" rIns="91440" bIns="45720" rtlCol="0" anchor="b"/>
+          <a:lstStyle>
+            <a:lvl1pPr algn="r">
+              <a:defRPr sz="1200"/>
+            </a:lvl1pPr>
+          </a:lstStyle>
+          <a:p>
+            <a:fld id="{0452A874-6DCF-4D13-B3C5-87233F74CAB1}" type="slidenum">
+              <a:rPr lang="zh-TW" altLang="en-US" smtClean="0"/>
+              <a:t>‹#›</a:t>
+            </a:fld>
+            <a:endParaRPr lang="zh-TW" altLang="en-US"/>
+          </a:p>
+        </p:txBody>
+      </p:sp>
+    </p:spTree>
+    <p:extLst>
+      <p:ext uri="{BB962C8B-B14F-4D97-AF65-F5344CB8AC3E}">
+        <p14:creationId xmlns:p14="http://schemas.microsoft.com/office/powerpoint/2010/main" val="1500295623"/>
+      </p:ext>
+    </p:extLst>
+  </p:cSld>
+  <p:clrMap bg1="lt1" tx1="dk1" bg2="lt2" tx2="dk2" accent1="accent1" accent2="accent2" accent3="accent3" accent4="accent4" accent5="accent5" accent6="accent6" hlink="hlink" folHlink="folHlink"/>
+  <p:notesStyle>
+    <a:lvl1pPr marL="0" algn="l" defTabSz="914400" rtl="0" eaLnBrk="1" latinLnBrk="0" hangingPunct="1">
+      <a:defRPr sz="1200" kern="1200">
+        <a:solidFill>
+          <a:schemeClr val="tx1"/>
+        </a:solidFill>
+        <a:latin typeface="+mn-lt"/>
+        <a:ea typeface="+mn-ea"/>
+        <a:cs typeface="+mn-cs"/>
+      </a:defRPr>
+    </a:lvl1pPr>
+    <a:lvl2pPr marL="457200" algn="l" defTabSz="914400" rtl="0" eaLnBrk="1" latinLnBrk="0" hangingPunct="1">
+      <a:defRPr sz="1200" kern="1200">
+        <a:solidFill>
+          <a:schemeClr val="tx1"/>
+        </a:solidFill>
+        <a:latin typeface="+mn-lt"/>
+        <a:ea typeface="+mn-ea"/>
+        <a:cs typeface="+mn-cs"/>
+      </a:defRPr>
+    </a:lvl2pPr>
+    <a:lvl3pPr marL="914400" algn="l" defTabSz="914400" rtl="0" eaLnBrk="1" latinLnBrk="0" hangingPunct="1">
+      <a:defRPr sz="1200" kern="1200">
+        <a:solidFill>
+          <a:schemeClr val="tx1"/>
+        </a:solidFill>
+        <a:latin typeface="+mn-lt"/>
+        <a:ea typeface="+mn-ea"/>
+        <a:cs typeface="+mn-cs"/>
+      </a:defRPr>
+    </a:lvl3pPr>
+    <a:lvl4pPr marL="1371600" algn="l" defTabSz="914400" rtl="0" eaLnBrk="1" latinLnBrk="0" hangingPunct="1">
+      <a:defRPr sz="1200" kern="1200">
+        <a:solidFill>
+          <a:schemeClr val="tx1"/>
+        </a:solidFill>
+        <a:latin typeface="+mn-lt"/>
+        <a:ea typeface="+mn-ea"/>
+        <a:cs typeface="+mn-cs"/>
+      </a:defRPr>
+    </a:lvl4pPr>
+    <a:lvl5pPr marL="1828800" algn="l" defTabSz="914400" rtl="0" eaLnBrk="1" latinLnBrk="0" hangingPunct="1">
+      <a:defRPr sz="1200" kern="1200">
+        <a:solidFill>
+          <a:schemeClr val="tx1"/>
+        </a:solidFill>
+        <a:latin typeface="+mn-lt"/>
+        <a:ea typeface="+mn-ea"/>
+        <a:cs typeface="+mn-cs"/>
+      </a:defRPr>
+    </a:lvl5pPr>
+    <a:lvl6pPr marL="2286000" algn="l" defTabSz="914400" rtl="0" eaLnBrk="1" latinLnBrk="0" hangingPunct="1">
+      <a:defRPr sz="1200" kern="1200">
+        <a:solidFill>
+          <a:schemeClr val="tx1"/>
+        </a:solidFill>
+        <a:latin typeface="+mn-lt"/>
+        <a:ea typeface="+mn-ea"/>
+        <a:cs typeface="+mn-cs"/>
+      </a:defRPr>
+    </a:lvl6pPr>
+    <a:lvl7pPr marL="2743200" algn="l" defTabSz="914400" rtl="0" eaLnBrk="1" latinLnBrk="0" hangingPunct="1">
+      <a:defRPr sz="1200" kern="1200">
+        <a:solidFill>
+          <a:schemeClr val="tx1"/>
+        </a:solidFill>
+        <a:latin typeface="+mn-lt"/>
+        <a:ea typeface="+mn-ea"/>
+        <a:cs typeface="+mn-cs"/>
+      </a:defRPr>
+    </a:lvl7pPr>
+    <a:lvl8pPr marL="3200400" algn="l" defTabSz="914400" rtl="0" eaLnBrk="1" latinLnBrk="0" hangingPunct="1">
+      <a:defRPr sz="1200" kern="1200">
+        <a:solidFill>
+          <a:schemeClr val="tx1"/>
+        </a:solidFill>
+        <a:latin typeface="+mn-lt"/>
+        <a:ea typeface="+mn-ea"/>
+        <a:cs typeface="+mn-cs"/>
+      </a:defRPr>
+    </a:lvl8pPr>
+    <a:lvl9pPr marL="3657600" algn="l" defTabSz="914400" rtl="0" eaLnBrk="1" latinLnBrk="0" hangingPunct="1">
+      <a:defRPr sz="1200" kern="1200">
+        <a:solidFill>
+          <a:schemeClr val="tx1"/>
+        </a:solidFill>
+        <a:latin typeface="+mn-lt"/>
+        <a:ea typeface="+mn-ea"/>
+        <a:cs typeface="+mn-cs"/>
+      </a:defRPr>
+    </a:lvl9pPr>
+  </p:notesStyle>
+</p:notesMaster>
+</file>
+
+<file path=ppt/notesSlides/notesSlide1.xml><?xml version="1.0" encoding="utf-8"?>
+<p:notes xmlns:a="http://schemas.openxmlformats.org/drawingml/2006/main" xmlns:r="http://schemas.openxmlformats.org/officeDocument/2006/relationships" xmlns:p="http://schemas.openxmlformats.org/presentationml/2006/main">
+  <p:cSld>
+    <p:spTree>
+      <p:nvGrpSpPr>
+        <p:cNvPr id="1" name=""/>
+        <p:cNvGrpSpPr/>
+        <p:nvPr/>
+      </p:nvGrpSpPr>
+      <p:grpSpPr>
+        <a:xfrm>
+          <a:off x="0" y="0"/>
+          <a:ext cx="0" cy="0"/>
+          <a:chOff x="0" y="0"/>
+          <a:chExt cx="0" cy="0"/>
+        </a:xfrm>
+      </p:grpSpPr>
+      <p:sp>
+        <p:nvSpPr>
+          <p:cNvPr id="2" name="投影片影像版面配置區 1"/>
+          <p:cNvSpPr>
+            <a:spLocks noGrp="1" noRot="1" noChangeAspect="1"/>
+          </p:cNvSpPr>
+          <p:nvPr>
+            <p:ph type="sldImg"/>
+          </p:nvPr>
+        </p:nvSpPr>
+        <p:spPr/>
+      </p:sp>
+      <p:sp>
+        <p:nvSpPr>
+          <p:cNvPr id="3" name="備忘稿版面配置區 2"/>
+          <p:cNvSpPr>
+            <a:spLocks noGrp="1"/>
+          </p:cNvSpPr>
+          <p:nvPr>
+            <p:ph type="body" idx="1"/>
+          </p:nvPr>
+        </p:nvSpPr>
+        <p:spPr/>
+        <p:txBody>
+          <a:bodyPr/>
+          <a:lstStyle/>
+          <a:p>
+            <a:endParaRPr lang="zh-TW" altLang="en-US"/>
+          </a:p>
+        </p:txBody>
+      </p:sp>
+      <p:sp>
+        <p:nvSpPr>
+          <p:cNvPr id="4" name="投影片編號版面配置區 3"/>
+          <p:cNvSpPr>
+            <a:spLocks noGrp="1"/>
+          </p:cNvSpPr>
+          <p:nvPr>
+            <p:ph type="sldNum" sz="quarter" idx="5"/>
+          </p:nvPr>
+        </p:nvSpPr>
+        <p:spPr/>
+        <p:txBody>
+          <a:bodyPr/>
+          <a:lstStyle/>
+          <a:p>
+            <a:fld id="{0452A874-6DCF-4D13-B3C5-87233F74CAB1}" type="slidenum">
+              <a:rPr lang="zh-TW" altLang="en-US" smtClean="0"/>
+              <a:t>5</a:t>
+            </a:fld>
+            <a:endParaRPr lang="zh-TW" altLang="en-US"/>
+          </a:p>
+        </p:txBody>
+      </p:sp>
+    </p:spTree>
+    <p:extLst>
+      <p:ext uri="{BB962C8B-B14F-4D97-AF65-F5344CB8AC3E}">
+        <p14:creationId xmlns:p14="http://schemas.microsoft.com/office/powerpoint/2010/main" val="854159566"/>
+      </p:ext>
+    </p:extLst>
+  </p:cSld>
+  <p:clrMapOvr>
+    <a:masterClrMapping/>
+  </p:clrMapOvr>
+</p:notes>
 </file>
 
 <file path=ppt/slideLayouts/slideLayout1.xml><?xml version="1.0" encoding="utf-8"?>
@@ -257,7 +699,7 @@
           <a:p>
             <a:fld id="{95AEDF69-78C5-4321-AD9F-E50A3E378F73}" type="datetimeFigureOut">
               <a:rPr lang="zh-TW" altLang="en-US" smtClean="0"/>
-              <a:t>2026/3/30</a:t>
+              <a:t>2026/4/6</a:t>
             </a:fld>
             <a:endParaRPr lang="zh-TW" altLang="en-US"/>
           </a:p>
@@ -455,7 +897,7 @@
           <a:p>
             <a:fld id="{95AEDF69-78C5-4321-AD9F-E50A3E378F73}" type="datetimeFigureOut">
               <a:rPr lang="zh-TW" altLang="en-US" smtClean="0"/>
-              <a:t>2026/3/30</a:t>
+              <a:t>2026/4/6</a:t>
             </a:fld>
             <a:endParaRPr lang="zh-TW" altLang="en-US"/>
           </a:p>
@@ -663,7 +1105,7 @@
           <a:p>
             <a:fld id="{95AEDF69-78C5-4321-AD9F-E50A3E378F73}" type="datetimeFigureOut">
               <a:rPr lang="zh-TW" altLang="en-US" smtClean="0"/>
-              <a:t>2026/3/30</a:t>
+              <a:t>2026/4/6</a:t>
             </a:fld>
             <a:endParaRPr lang="zh-TW" altLang="en-US"/>
           </a:p>
@@ -861,7 +1303,7 @@
           <a:p>
             <a:fld id="{95AEDF69-78C5-4321-AD9F-E50A3E378F73}" type="datetimeFigureOut">
               <a:rPr lang="zh-TW" altLang="en-US" smtClean="0"/>
-              <a:t>2026/3/30</a:t>
+              <a:t>2026/4/6</a:t>
             </a:fld>
             <a:endParaRPr lang="zh-TW" altLang="en-US"/>
           </a:p>
@@ -1136,7 +1578,7 @@
           <a:p>
             <a:fld id="{95AEDF69-78C5-4321-AD9F-E50A3E378F73}" type="datetimeFigureOut">
               <a:rPr lang="zh-TW" altLang="en-US" smtClean="0"/>
-              <a:t>2026/3/30</a:t>
+              <a:t>2026/4/6</a:t>
             </a:fld>
             <a:endParaRPr lang="zh-TW" altLang="en-US"/>
           </a:p>
@@ -1401,7 +1843,7 @@
           <a:p>
             <a:fld id="{95AEDF69-78C5-4321-AD9F-E50A3E378F73}" type="datetimeFigureOut">
               <a:rPr lang="zh-TW" altLang="en-US" smtClean="0"/>
-              <a:t>2026/3/30</a:t>
+              <a:t>2026/4/6</a:t>
             </a:fld>
             <a:endParaRPr lang="zh-TW" altLang="en-US"/>
           </a:p>
@@ -1813,7 +2255,7 @@
           <a:p>
             <a:fld id="{95AEDF69-78C5-4321-AD9F-E50A3E378F73}" type="datetimeFigureOut">
               <a:rPr lang="zh-TW" altLang="en-US" smtClean="0"/>
-              <a:t>2026/3/30</a:t>
+              <a:t>2026/4/6</a:t>
             </a:fld>
             <a:endParaRPr lang="zh-TW" altLang="en-US"/>
           </a:p>
@@ -1954,7 +2396,7 @@
           <a:p>
             <a:fld id="{95AEDF69-78C5-4321-AD9F-E50A3E378F73}" type="datetimeFigureOut">
               <a:rPr lang="zh-TW" altLang="en-US" smtClean="0"/>
-              <a:t>2026/3/30</a:t>
+              <a:t>2026/4/6</a:t>
             </a:fld>
             <a:endParaRPr lang="zh-TW" altLang="en-US"/>
           </a:p>
@@ -2067,7 +2509,7 @@
           <a:p>
             <a:fld id="{95AEDF69-78C5-4321-AD9F-E50A3E378F73}" type="datetimeFigureOut">
               <a:rPr lang="zh-TW" altLang="en-US" smtClean="0"/>
-              <a:t>2026/3/30</a:t>
+              <a:t>2026/4/6</a:t>
             </a:fld>
             <a:endParaRPr lang="zh-TW" altLang="en-US"/>
           </a:p>
@@ -2378,7 +2820,7 @@
           <a:p>
             <a:fld id="{95AEDF69-78C5-4321-AD9F-E50A3E378F73}" type="datetimeFigureOut">
               <a:rPr lang="zh-TW" altLang="en-US" smtClean="0"/>
-              <a:t>2026/3/30</a:t>
+              <a:t>2026/4/6</a:t>
             </a:fld>
             <a:endParaRPr lang="zh-TW" altLang="en-US"/>
           </a:p>
@@ -2666,7 +3108,7 @@
           <a:p>
             <a:fld id="{95AEDF69-78C5-4321-AD9F-E50A3E378F73}" type="datetimeFigureOut">
               <a:rPr lang="zh-TW" altLang="en-US" smtClean="0"/>
-              <a:t>2026/3/30</a:t>
+              <a:t>2026/4/6</a:t>
             </a:fld>
             <a:endParaRPr lang="zh-TW" altLang="en-US"/>
           </a:p>
@@ -2907,7 +3349,7 @@
           <a:p>
             <a:fld id="{95AEDF69-78C5-4321-AD9F-E50A3E378F73}" type="datetimeFigureOut">
               <a:rPr lang="zh-TW" altLang="en-US" smtClean="0"/>
-              <a:t>2026/3/30</a:t>
+              <a:t>2026/4/6</a:t>
             </a:fld>
             <a:endParaRPr lang="zh-TW" altLang="en-US"/>
           </a:p>
@@ -4369,6 +4811,1285 @@
 </p:sld>
 </file>
 
+<file path=ppt/slides/slide5.xml><?xml version="1.0" encoding="utf-8"?>
+<p:sld xmlns:a="http://schemas.openxmlformats.org/drawingml/2006/main" xmlns:r="http://schemas.openxmlformats.org/officeDocument/2006/relationships" xmlns:p="http://schemas.openxmlformats.org/presentationml/2006/main">
+  <p:cSld>
+    <p:spTree>
+      <p:nvGrpSpPr>
+        <p:cNvPr id="1" name=""/>
+        <p:cNvGrpSpPr/>
+        <p:nvPr/>
+      </p:nvGrpSpPr>
+      <p:grpSpPr>
+        <a:xfrm>
+          <a:off x="0" y="0"/>
+          <a:ext cx="0" cy="0"/>
+          <a:chOff x="0" y="0"/>
+          <a:chExt cx="0" cy="0"/>
+        </a:xfrm>
+      </p:grpSpPr>
+      <p:sp>
+        <p:nvSpPr>
+          <p:cNvPr id="2" name="標題 1">
+            <a:extLst>
+              <a:ext uri="{FF2B5EF4-FFF2-40B4-BE49-F238E27FC236}">
+                <a16:creationId xmlns:a16="http://schemas.microsoft.com/office/drawing/2014/main" id="{38BEFD71-C833-8803-254F-6A3B90FCE4FB}"/>
+              </a:ext>
+            </a:extLst>
+          </p:cNvPr>
+          <p:cNvSpPr>
+            <a:spLocks noGrp="1"/>
+          </p:cNvSpPr>
+          <p:nvPr>
+            <p:ph type="title"/>
+          </p:nvPr>
+        </p:nvSpPr>
+        <p:spPr/>
+        <p:txBody>
+          <a:bodyPr/>
+          <a:lstStyle/>
+          <a:p>
+            <a:endParaRPr lang="zh-TW" altLang="en-US"/>
+          </a:p>
+        </p:txBody>
+      </p:sp>
+      <p:sp>
+        <p:nvSpPr>
+          <p:cNvPr id="3" name="內容版面配置區 2">
+            <a:extLst>
+              <a:ext uri="{FF2B5EF4-FFF2-40B4-BE49-F238E27FC236}">
+                <a16:creationId xmlns:a16="http://schemas.microsoft.com/office/drawing/2014/main" id="{553579D7-38EC-CE1E-107C-E6EC55B24A9B}"/>
+              </a:ext>
+            </a:extLst>
+          </p:cNvPr>
+          <p:cNvSpPr>
+            <a:spLocks noGrp="1"/>
+          </p:cNvSpPr>
+          <p:nvPr>
+            <p:ph idx="1"/>
+          </p:nvPr>
+        </p:nvSpPr>
+        <p:spPr/>
+        <p:txBody>
+          <a:bodyPr/>
+          <a:lstStyle/>
+          <a:p>
+            <a:endParaRPr lang="zh-TW" altLang="en-US"/>
+          </a:p>
+        </p:txBody>
+      </p:sp>
+      <p:pic>
+        <p:nvPicPr>
+          <p:cNvPr id="5" name="圖片 4">
+            <a:extLst>
+              <a:ext uri="{FF2B5EF4-FFF2-40B4-BE49-F238E27FC236}">
+                <a16:creationId xmlns:a16="http://schemas.microsoft.com/office/drawing/2014/main" id="{914C275E-1871-3411-ED93-294C16EA4C19}"/>
+              </a:ext>
+            </a:extLst>
+          </p:cNvPr>
+          <p:cNvPicPr>
+            <a:picLocks noChangeAspect="1"/>
+          </p:cNvPicPr>
+          <p:nvPr/>
+        </p:nvPicPr>
+        <p:blipFill>
+          <a:blip r:embed="rId3"/>
+          <a:stretch>
+            <a:fillRect/>
+          </a:stretch>
+        </p:blipFill>
+        <p:spPr>
+          <a:xfrm>
+            <a:off x="0" y="78133"/>
+            <a:ext cx="12192000" cy="6701734"/>
+          </a:xfrm>
+          <a:prstGeom prst="rect">
+            <a:avLst/>
+          </a:prstGeom>
+        </p:spPr>
+      </p:pic>
+      <p:pic>
+        <p:nvPicPr>
+          <p:cNvPr id="7" name="圖片 6">
+            <a:extLst>
+              <a:ext uri="{FF2B5EF4-FFF2-40B4-BE49-F238E27FC236}">
+                <a16:creationId xmlns:a16="http://schemas.microsoft.com/office/drawing/2014/main" id="{8F7DCEC3-3051-6212-CFB1-026B852B5AFA}"/>
+              </a:ext>
+            </a:extLst>
+          </p:cNvPr>
+          <p:cNvPicPr>
+            <a:picLocks noChangeAspect="1"/>
+          </p:cNvPicPr>
+          <p:nvPr/>
+        </p:nvPicPr>
+        <p:blipFill>
+          <a:blip r:embed="rId4"/>
+          <a:stretch>
+            <a:fillRect/>
+          </a:stretch>
+        </p:blipFill>
+        <p:spPr>
+          <a:xfrm>
+            <a:off x="5024582" y="3033260"/>
+            <a:ext cx="1947956" cy="2831832"/>
+          </a:xfrm>
+          <a:prstGeom prst="rect">
+            <a:avLst/>
+          </a:prstGeom>
+        </p:spPr>
+      </p:pic>
+      <p:pic>
+        <p:nvPicPr>
+          <p:cNvPr id="9" name="圖片 8">
+            <a:extLst>
+              <a:ext uri="{FF2B5EF4-FFF2-40B4-BE49-F238E27FC236}">
+                <a16:creationId xmlns:a16="http://schemas.microsoft.com/office/drawing/2014/main" id="{0E4098D8-1F8C-8878-32AE-E4509264EAFA}"/>
+              </a:ext>
+            </a:extLst>
+          </p:cNvPr>
+          <p:cNvPicPr>
+            <a:picLocks noChangeAspect="1"/>
+          </p:cNvPicPr>
+          <p:nvPr/>
+        </p:nvPicPr>
+        <p:blipFill>
+          <a:blip r:embed="rId5">
+            <a:extLst>
+              <a:ext uri="{BEBA8EAE-BF5A-486C-A8C5-ECC9F3942E4B}">
+                <a14:imgProps xmlns:a14="http://schemas.microsoft.com/office/drawing/2010/main">
+                  <a14:imgLayer r:embed="rId6">
+                    <a14:imgEffect>
+                      <a14:backgroundRemoval t="6122" b="89796" l="0" r="97368">
+                        <a14:foregroundMark x1="72368" y1="24490" x2="0" y2="77551"/>
+                        <a14:foregroundMark x1="84211" y1="20408" x2="97368" y2="6122"/>
+                        <a14:foregroundMark x1="13158" y1="65306" x2="67105" y2="18367"/>
+                        <a14:foregroundMark x1="69737" y1="18367" x2="84211" y2="8163"/>
+                        <a14:foregroundMark x1="89474" y1="24490" x2="2632" y2="83673"/>
+                        <a14:foregroundMark x1="21053" y1="53061" x2="0" y2="69388"/>
+                      </a14:backgroundRemoval>
+                    </a14:imgEffect>
+                  </a14:imgLayer>
+                </a14:imgProps>
+              </a:ext>
+            </a:extLst>
+          </a:blip>
+          <a:stretch>
+            <a:fillRect/>
+          </a:stretch>
+        </p:blipFill>
+        <p:spPr>
+          <a:xfrm rot="2954624">
+            <a:off x="4924786" y="3173454"/>
+            <a:ext cx="723900" cy="466725"/>
+          </a:xfrm>
+          <a:prstGeom prst="rect">
+            <a:avLst/>
+          </a:prstGeom>
+        </p:spPr>
+      </p:pic>
+      <p:pic>
+        <p:nvPicPr>
+          <p:cNvPr id="15" name="圖片 14">
+            <a:extLst>
+              <a:ext uri="{FF2B5EF4-FFF2-40B4-BE49-F238E27FC236}">
+                <a16:creationId xmlns:a16="http://schemas.microsoft.com/office/drawing/2014/main" id="{2CF81B3A-68BA-B4D7-359B-5F116BE3706B}"/>
+              </a:ext>
+            </a:extLst>
+          </p:cNvPr>
+          <p:cNvPicPr>
+            <a:picLocks noChangeAspect="1"/>
+          </p:cNvPicPr>
+          <p:nvPr/>
+        </p:nvPicPr>
+        <p:blipFill>
+          <a:blip r:embed="rId5">
+            <a:extLst>
+              <a:ext uri="{BEBA8EAE-BF5A-486C-A8C5-ECC9F3942E4B}">
+                <a14:imgProps xmlns:a14="http://schemas.microsoft.com/office/drawing/2010/main">
+                  <a14:imgLayer r:embed="rId6">
+                    <a14:imgEffect>
+                      <a14:backgroundRemoval t="6122" b="89796" l="0" r="97368">
+                        <a14:foregroundMark x1="72368" y1="24490" x2="0" y2="77551"/>
+                        <a14:foregroundMark x1="84211" y1="20408" x2="97368" y2="6122"/>
+                        <a14:foregroundMark x1="13158" y1="65306" x2="67105" y2="18367"/>
+                        <a14:foregroundMark x1="69737" y1="18367" x2="84211" y2="8163"/>
+                        <a14:foregroundMark x1="89474" y1="24490" x2="2632" y2="83673"/>
+                        <a14:foregroundMark x1="21053" y1="53061" x2="0" y2="69388"/>
+                      </a14:backgroundRemoval>
+                    </a14:imgEffect>
+                  </a14:imgLayer>
+                </a14:imgProps>
+              </a:ext>
+            </a:extLst>
+          </a:blip>
+          <a:stretch>
+            <a:fillRect/>
+          </a:stretch>
+        </p:blipFill>
+        <p:spPr>
+          <a:xfrm rot="2900611">
+            <a:off x="3961504" y="4119280"/>
+            <a:ext cx="723900" cy="466725"/>
+          </a:xfrm>
+          <a:prstGeom prst="rect">
+            <a:avLst/>
+          </a:prstGeom>
+        </p:spPr>
+      </p:pic>
+      <p:pic>
+        <p:nvPicPr>
+          <p:cNvPr id="16" name="圖片 15">
+            <a:extLst>
+              <a:ext uri="{FF2B5EF4-FFF2-40B4-BE49-F238E27FC236}">
+                <a16:creationId xmlns:a16="http://schemas.microsoft.com/office/drawing/2014/main" id="{52ACCA32-2EFA-464F-DB5C-1E10A822EF0C}"/>
+              </a:ext>
+            </a:extLst>
+          </p:cNvPr>
+          <p:cNvPicPr>
+            <a:picLocks noChangeAspect="1"/>
+          </p:cNvPicPr>
+          <p:nvPr/>
+        </p:nvPicPr>
+        <p:blipFill>
+          <a:blip r:embed="rId5">
+            <a:extLst>
+              <a:ext uri="{BEBA8EAE-BF5A-486C-A8C5-ECC9F3942E4B}">
+                <a14:imgProps xmlns:a14="http://schemas.microsoft.com/office/drawing/2010/main">
+                  <a14:imgLayer r:embed="rId6">
+                    <a14:imgEffect>
+                      <a14:backgroundRemoval t="6122" b="89796" l="0" r="97368">
+                        <a14:foregroundMark x1="72368" y1="24490" x2="0" y2="77551"/>
+                        <a14:foregroundMark x1="84211" y1="20408" x2="97368" y2="6122"/>
+                        <a14:foregroundMark x1="13158" y1="65306" x2="67105" y2="18367"/>
+                        <a14:foregroundMark x1="69737" y1="18367" x2="84211" y2="8163"/>
+                        <a14:foregroundMark x1="89474" y1="24490" x2="2632" y2="83673"/>
+                        <a14:foregroundMark x1="21053" y1="53061" x2="0" y2="69388"/>
+                      </a14:backgroundRemoval>
+                    </a14:imgEffect>
+                  </a14:imgLayer>
+                </a14:imgProps>
+              </a:ext>
+            </a:extLst>
+          </a:blip>
+          <a:stretch>
+            <a:fillRect/>
+          </a:stretch>
+        </p:blipFill>
+        <p:spPr>
+          <a:xfrm rot="2900611">
+            <a:off x="3415074" y="3874864"/>
+            <a:ext cx="723900" cy="466725"/>
+          </a:xfrm>
+          <a:prstGeom prst="rect">
+            <a:avLst/>
+          </a:prstGeom>
+        </p:spPr>
+      </p:pic>
+      <p:pic>
+        <p:nvPicPr>
+          <p:cNvPr id="17" name="圖片 16">
+            <a:extLst>
+              <a:ext uri="{FF2B5EF4-FFF2-40B4-BE49-F238E27FC236}">
+                <a16:creationId xmlns:a16="http://schemas.microsoft.com/office/drawing/2014/main" id="{AB035B9F-2932-D451-048E-96E09A6653D0}"/>
+              </a:ext>
+            </a:extLst>
+          </p:cNvPr>
+          <p:cNvPicPr>
+            <a:picLocks noChangeAspect="1"/>
+          </p:cNvPicPr>
+          <p:nvPr/>
+        </p:nvPicPr>
+        <p:blipFill>
+          <a:blip r:embed="rId5">
+            <a:extLst>
+              <a:ext uri="{BEBA8EAE-BF5A-486C-A8C5-ECC9F3942E4B}">
+                <a14:imgProps xmlns:a14="http://schemas.microsoft.com/office/drawing/2010/main">
+                  <a14:imgLayer r:embed="rId6">
+                    <a14:imgEffect>
+                      <a14:backgroundRemoval t="6122" b="89796" l="0" r="97368">
+                        <a14:foregroundMark x1="72368" y1="24490" x2="0" y2="77551"/>
+                        <a14:foregroundMark x1="84211" y1="20408" x2="97368" y2="6122"/>
+                        <a14:foregroundMark x1="13158" y1="65306" x2="67105" y2="18367"/>
+                        <a14:foregroundMark x1="69737" y1="18367" x2="84211" y2="8163"/>
+                        <a14:foregroundMark x1="89474" y1="24490" x2="2632" y2="83673"/>
+                        <a14:foregroundMark x1="21053" y1="53061" x2="0" y2="69388"/>
+                      </a14:backgroundRemoval>
+                    </a14:imgEffect>
+                  </a14:imgLayer>
+                </a14:imgProps>
+              </a:ext>
+            </a:extLst>
+          </a:blip>
+          <a:stretch>
+            <a:fillRect/>
+          </a:stretch>
+        </p:blipFill>
+        <p:spPr>
+          <a:xfrm rot="2900611">
+            <a:off x="2884272" y="3639894"/>
+            <a:ext cx="723900" cy="466725"/>
+          </a:xfrm>
+          <a:prstGeom prst="rect">
+            <a:avLst/>
+          </a:prstGeom>
+        </p:spPr>
+      </p:pic>
+      <p:pic>
+        <p:nvPicPr>
+          <p:cNvPr id="18" name="圖片 17">
+            <a:extLst>
+              <a:ext uri="{FF2B5EF4-FFF2-40B4-BE49-F238E27FC236}">
+                <a16:creationId xmlns:a16="http://schemas.microsoft.com/office/drawing/2014/main" id="{6F04C9DD-EF5C-8FB4-D2B9-E977DA906050}"/>
+              </a:ext>
+            </a:extLst>
+          </p:cNvPr>
+          <p:cNvPicPr>
+            <a:picLocks noChangeAspect="1"/>
+          </p:cNvPicPr>
+          <p:nvPr/>
+        </p:nvPicPr>
+        <p:blipFill>
+          <a:blip r:embed="rId5">
+            <a:extLst>
+              <a:ext uri="{BEBA8EAE-BF5A-486C-A8C5-ECC9F3942E4B}">
+                <a14:imgProps xmlns:a14="http://schemas.microsoft.com/office/drawing/2010/main">
+                  <a14:imgLayer r:embed="rId6">
+                    <a14:imgEffect>
+                      <a14:backgroundRemoval t="6122" b="89796" l="0" r="97368">
+                        <a14:foregroundMark x1="72368" y1="24490" x2="0" y2="77551"/>
+                        <a14:foregroundMark x1="84211" y1="20408" x2="97368" y2="6122"/>
+                        <a14:foregroundMark x1="13158" y1="65306" x2="67105" y2="18367"/>
+                        <a14:foregroundMark x1="69737" y1="18367" x2="84211" y2="8163"/>
+                        <a14:foregroundMark x1="89474" y1="24490" x2="2632" y2="83673"/>
+                        <a14:foregroundMark x1="21053" y1="53061" x2="0" y2="69388"/>
+                      </a14:backgroundRemoval>
+                    </a14:imgEffect>
+                  </a14:imgLayer>
+                </a14:imgProps>
+              </a:ext>
+            </a:extLst>
+          </a:blip>
+          <a:stretch>
+            <a:fillRect/>
+          </a:stretch>
+        </p:blipFill>
+        <p:spPr>
+          <a:xfrm rot="2900611">
+            <a:off x="2221970" y="3340342"/>
+            <a:ext cx="723900" cy="466725"/>
+          </a:xfrm>
+          <a:prstGeom prst="rect">
+            <a:avLst/>
+          </a:prstGeom>
+        </p:spPr>
+      </p:pic>
+      <p:pic>
+        <p:nvPicPr>
+          <p:cNvPr id="19" name="圖片 18">
+            <a:extLst>
+              <a:ext uri="{FF2B5EF4-FFF2-40B4-BE49-F238E27FC236}">
+                <a16:creationId xmlns:a16="http://schemas.microsoft.com/office/drawing/2014/main" id="{279BF7F6-1620-CB62-27F2-FF0A1F64EB66}"/>
+              </a:ext>
+            </a:extLst>
+          </p:cNvPr>
+          <p:cNvPicPr>
+            <a:picLocks noChangeAspect="1"/>
+          </p:cNvPicPr>
+          <p:nvPr/>
+        </p:nvPicPr>
+        <p:blipFill>
+          <a:blip r:embed="rId5">
+            <a:extLst>
+              <a:ext uri="{BEBA8EAE-BF5A-486C-A8C5-ECC9F3942E4B}">
+                <a14:imgProps xmlns:a14="http://schemas.microsoft.com/office/drawing/2010/main">
+                  <a14:imgLayer r:embed="rId6">
+                    <a14:imgEffect>
+                      <a14:backgroundRemoval t="6122" b="89796" l="0" r="97368">
+                        <a14:foregroundMark x1="72368" y1="24490" x2="0" y2="77551"/>
+                        <a14:foregroundMark x1="84211" y1="20408" x2="97368" y2="6122"/>
+                        <a14:foregroundMark x1="13158" y1="65306" x2="67105" y2="18367"/>
+                        <a14:foregroundMark x1="69737" y1="18367" x2="84211" y2="8163"/>
+                        <a14:foregroundMark x1="89474" y1="24490" x2="2632" y2="83673"/>
+                        <a14:foregroundMark x1="21053" y1="53061" x2="0" y2="69388"/>
+                      </a14:backgroundRemoval>
+                    </a14:imgEffect>
+                  </a14:imgLayer>
+                </a14:imgProps>
+              </a:ext>
+            </a:extLst>
+          </a:blip>
+          <a:stretch>
+            <a:fillRect/>
+          </a:stretch>
+        </p:blipFill>
+        <p:spPr>
+          <a:xfrm rot="2900611">
+            <a:off x="1671756" y="3095357"/>
+            <a:ext cx="723900" cy="466725"/>
+          </a:xfrm>
+          <a:prstGeom prst="rect">
+            <a:avLst/>
+          </a:prstGeom>
+        </p:spPr>
+      </p:pic>
+      <p:pic>
+        <p:nvPicPr>
+          <p:cNvPr id="20" name="圖片 19">
+            <a:extLst>
+              <a:ext uri="{FF2B5EF4-FFF2-40B4-BE49-F238E27FC236}">
+                <a16:creationId xmlns:a16="http://schemas.microsoft.com/office/drawing/2014/main" id="{919DC4B2-806E-4686-3D25-18A76112F664}"/>
+              </a:ext>
+            </a:extLst>
+          </p:cNvPr>
+          <p:cNvPicPr>
+            <a:picLocks noChangeAspect="1"/>
+          </p:cNvPicPr>
+          <p:nvPr/>
+        </p:nvPicPr>
+        <p:blipFill>
+          <a:blip r:embed="rId5">
+            <a:extLst>
+              <a:ext uri="{BEBA8EAE-BF5A-486C-A8C5-ECC9F3942E4B}">
+                <a14:imgProps xmlns:a14="http://schemas.microsoft.com/office/drawing/2010/main">
+                  <a14:imgLayer r:embed="rId6">
+                    <a14:imgEffect>
+                      <a14:backgroundRemoval t="6122" b="89796" l="0" r="97368">
+                        <a14:foregroundMark x1="72368" y1="24490" x2="0" y2="77551"/>
+                        <a14:foregroundMark x1="84211" y1="20408" x2="97368" y2="6122"/>
+                        <a14:foregroundMark x1="13158" y1="65306" x2="67105" y2="18367"/>
+                        <a14:foregroundMark x1="69737" y1="18367" x2="84211" y2="8163"/>
+                        <a14:foregroundMark x1="89474" y1="24490" x2="2632" y2="83673"/>
+                        <a14:foregroundMark x1="21053" y1="53061" x2="0" y2="69388"/>
+                      </a14:backgroundRemoval>
+                    </a14:imgEffect>
+                  </a14:imgLayer>
+                </a14:imgProps>
+              </a:ext>
+            </a:extLst>
+          </a:blip>
+          <a:stretch>
+            <a:fillRect/>
+          </a:stretch>
+        </p:blipFill>
+        <p:spPr>
+          <a:xfrm rot="2900611">
+            <a:off x="1015674" y="2802787"/>
+            <a:ext cx="723900" cy="466725"/>
+          </a:xfrm>
+          <a:prstGeom prst="rect">
+            <a:avLst/>
+          </a:prstGeom>
+        </p:spPr>
+      </p:pic>
+      <p:pic>
+        <p:nvPicPr>
+          <p:cNvPr id="21" name="圖片 20">
+            <a:extLst>
+              <a:ext uri="{FF2B5EF4-FFF2-40B4-BE49-F238E27FC236}">
+                <a16:creationId xmlns:a16="http://schemas.microsoft.com/office/drawing/2014/main" id="{4F21033F-03EE-8A12-8F2E-E29EA884E9FB}"/>
+              </a:ext>
+            </a:extLst>
+          </p:cNvPr>
+          <p:cNvPicPr>
+            <a:picLocks noChangeAspect="1"/>
+          </p:cNvPicPr>
+          <p:nvPr/>
+        </p:nvPicPr>
+        <p:blipFill>
+          <a:blip r:embed="rId5">
+            <a:extLst>
+              <a:ext uri="{BEBA8EAE-BF5A-486C-A8C5-ECC9F3942E4B}">
+                <a14:imgProps xmlns:a14="http://schemas.microsoft.com/office/drawing/2010/main">
+                  <a14:imgLayer r:embed="rId6">
+                    <a14:imgEffect>
+                      <a14:backgroundRemoval t="6122" b="89796" l="0" r="97368">
+                        <a14:foregroundMark x1="72368" y1="24490" x2="0" y2="77551"/>
+                        <a14:foregroundMark x1="84211" y1="20408" x2="97368" y2="6122"/>
+                        <a14:foregroundMark x1="13158" y1="65306" x2="67105" y2="18367"/>
+                        <a14:foregroundMark x1="69737" y1="18367" x2="84211" y2="8163"/>
+                        <a14:foregroundMark x1="89474" y1="24490" x2="2632" y2="83673"/>
+                        <a14:foregroundMark x1="21053" y1="53061" x2="0" y2="69388"/>
+                      </a14:backgroundRemoval>
+                    </a14:imgEffect>
+                  </a14:imgLayer>
+                </a14:imgProps>
+              </a:ext>
+            </a:extLst>
+          </a:blip>
+          <a:stretch>
+            <a:fillRect/>
+          </a:stretch>
+        </p:blipFill>
+        <p:spPr>
+          <a:xfrm rot="2900611">
+            <a:off x="553909" y="2599762"/>
+            <a:ext cx="723900" cy="466725"/>
+          </a:xfrm>
+          <a:prstGeom prst="rect">
+            <a:avLst/>
+          </a:prstGeom>
+        </p:spPr>
+      </p:pic>
+      <p:pic>
+        <p:nvPicPr>
+          <p:cNvPr id="22" name="圖片 21">
+            <a:extLst>
+              <a:ext uri="{FF2B5EF4-FFF2-40B4-BE49-F238E27FC236}">
+                <a16:creationId xmlns:a16="http://schemas.microsoft.com/office/drawing/2014/main" id="{DB6ADCCC-1F35-404E-CDE2-E9E91D8BC66B}"/>
+              </a:ext>
+            </a:extLst>
+          </p:cNvPr>
+          <p:cNvPicPr>
+            <a:picLocks noChangeAspect="1"/>
+          </p:cNvPicPr>
+          <p:nvPr/>
+        </p:nvPicPr>
+        <p:blipFill>
+          <a:blip r:embed="rId5">
+            <a:extLst>
+              <a:ext uri="{BEBA8EAE-BF5A-486C-A8C5-ECC9F3942E4B}">
+                <a14:imgProps xmlns:a14="http://schemas.microsoft.com/office/drawing/2010/main">
+                  <a14:imgLayer r:embed="rId6">
+                    <a14:imgEffect>
+                      <a14:backgroundRemoval t="6122" b="89796" l="0" r="97368">
+                        <a14:foregroundMark x1="72368" y1="24490" x2="0" y2="77551"/>
+                        <a14:foregroundMark x1="84211" y1="20408" x2="97368" y2="6122"/>
+                        <a14:foregroundMark x1="13158" y1="65306" x2="67105" y2="18367"/>
+                        <a14:foregroundMark x1="69737" y1="18367" x2="84211" y2="8163"/>
+                        <a14:foregroundMark x1="89474" y1="24490" x2="2632" y2="83673"/>
+                        <a14:foregroundMark x1="21053" y1="53061" x2="0" y2="69388"/>
+                      </a14:backgroundRemoval>
+                    </a14:imgEffect>
+                  </a14:imgLayer>
+                </a14:imgProps>
+              </a:ext>
+            </a:extLst>
+          </a:blip>
+          <a:stretch>
+            <a:fillRect/>
+          </a:stretch>
+        </p:blipFill>
+        <p:spPr>
+          <a:xfrm rot="2900611">
+            <a:off x="418746" y="2539142"/>
+            <a:ext cx="723900" cy="466725"/>
+          </a:xfrm>
+          <a:prstGeom prst="rect">
+            <a:avLst/>
+          </a:prstGeom>
+        </p:spPr>
+      </p:pic>
+      <p:pic>
+        <p:nvPicPr>
+          <p:cNvPr id="23" name="圖片 22">
+            <a:extLst>
+              <a:ext uri="{FF2B5EF4-FFF2-40B4-BE49-F238E27FC236}">
+                <a16:creationId xmlns:a16="http://schemas.microsoft.com/office/drawing/2014/main" id="{3133CBF1-1052-F9B5-87A6-7FBD77EBEC8A}"/>
+              </a:ext>
+            </a:extLst>
+          </p:cNvPr>
+          <p:cNvPicPr>
+            <a:picLocks noChangeAspect="1"/>
+          </p:cNvPicPr>
+          <p:nvPr/>
+        </p:nvPicPr>
+        <p:blipFill>
+          <a:blip r:embed="rId5">
+            <a:extLst>
+              <a:ext uri="{BEBA8EAE-BF5A-486C-A8C5-ECC9F3942E4B}">
+                <a14:imgProps xmlns:a14="http://schemas.microsoft.com/office/drawing/2010/main">
+                  <a14:imgLayer r:embed="rId6">
+                    <a14:imgEffect>
+                      <a14:backgroundRemoval t="6122" b="89796" l="0" r="97368">
+                        <a14:foregroundMark x1="72368" y1="24490" x2="0" y2="77551"/>
+                        <a14:foregroundMark x1="84211" y1="20408" x2="97368" y2="6122"/>
+                        <a14:foregroundMark x1="13158" y1="65306" x2="67105" y2="18367"/>
+                        <a14:foregroundMark x1="69737" y1="18367" x2="84211" y2="8163"/>
+                        <a14:foregroundMark x1="89474" y1="24490" x2="2632" y2="83673"/>
+                        <a14:foregroundMark x1="21053" y1="53061" x2="0" y2="69388"/>
+                      </a14:backgroundRemoval>
+                    </a14:imgEffect>
+                  </a14:imgLayer>
+                </a14:imgProps>
+              </a:ext>
+            </a:extLst>
+          </a:blip>
+          <a:stretch>
+            <a:fillRect/>
+          </a:stretch>
+        </p:blipFill>
+        <p:spPr>
+          <a:xfrm rot="10800000">
+            <a:off x="7371387" y="3851351"/>
+            <a:ext cx="723900" cy="466725"/>
+          </a:xfrm>
+          <a:prstGeom prst="rect">
+            <a:avLst/>
+          </a:prstGeom>
+        </p:spPr>
+      </p:pic>
+      <p:pic>
+        <p:nvPicPr>
+          <p:cNvPr id="24" name="圖片 23">
+            <a:extLst>
+              <a:ext uri="{FF2B5EF4-FFF2-40B4-BE49-F238E27FC236}">
+                <a16:creationId xmlns:a16="http://schemas.microsoft.com/office/drawing/2014/main" id="{16E97AA9-2DBC-EB30-4FAB-4FAE1E7EAE71}"/>
+              </a:ext>
+            </a:extLst>
+          </p:cNvPr>
+          <p:cNvPicPr>
+            <a:picLocks noChangeAspect="1"/>
+          </p:cNvPicPr>
+          <p:nvPr/>
+        </p:nvPicPr>
+        <p:blipFill>
+          <a:blip r:embed="rId5">
+            <a:extLst>
+              <a:ext uri="{BEBA8EAE-BF5A-486C-A8C5-ECC9F3942E4B}">
+                <a14:imgProps xmlns:a14="http://schemas.microsoft.com/office/drawing/2010/main">
+                  <a14:imgLayer r:embed="rId6">
+                    <a14:imgEffect>
+                      <a14:backgroundRemoval t="6122" b="89796" l="0" r="97368">
+                        <a14:foregroundMark x1="72368" y1="24490" x2="0" y2="77551"/>
+                        <a14:foregroundMark x1="84211" y1="20408" x2="97368" y2="6122"/>
+                        <a14:foregroundMark x1="13158" y1="65306" x2="67105" y2="18367"/>
+                        <a14:foregroundMark x1="69737" y1="18367" x2="84211" y2="8163"/>
+                        <a14:foregroundMark x1="89474" y1="24490" x2="2632" y2="83673"/>
+                        <a14:foregroundMark x1="21053" y1="53061" x2="0" y2="69388"/>
+                      </a14:backgroundRemoval>
+                    </a14:imgEffect>
+                  </a14:imgLayer>
+                </a14:imgProps>
+              </a:ext>
+            </a:extLst>
+          </a:blip>
+          <a:stretch>
+            <a:fillRect/>
+          </a:stretch>
+        </p:blipFill>
+        <p:spPr>
+          <a:xfrm rot="10800000">
+            <a:off x="6610588" y="4196582"/>
+            <a:ext cx="723900" cy="466725"/>
+          </a:xfrm>
+          <a:prstGeom prst="rect">
+            <a:avLst/>
+          </a:prstGeom>
+        </p:spPr>
+      </p:pic>
+      <p:pic>
+        <p:nvPicPr>
+          <p:cNvPr id="25" name="圖片 24">
+            <a:extLst>
+              <a:ext uri="{FF2B5EF4-FFF2-40B4-BE49-F238E27FC236}">
+                <a16:creationId xmlns:a16="http://schemas.microsoft.com/office/drawing/2014/main" id="{F265B6EC-0ADC-6411-A23C-0F75BF4E3186}"/>
+              </a:ext>
+            </a:extLst>
+          </p:cNvPr>
+          <p:cNvPicPr>
+            <a:picLocks noChangeAspect="1"/>
+          </p:cNvPicPr>
+          <p:nvPr/>
+        </p:nvPicPr>
+        <p:blipFill>
+          <a:blip r:embed="rId5">
+            <a:extLst>
+              <a:ext uri="{BEBA8EAE-BF5A-486C-A8C5-ECC9F3942E4B}">
+                <a14:imgProps xmlns:a14="http://schemas.microsoft.com/office/drawing/2010/main">
+                  <a14:imgLayer r:embed="rId6">
+                    <a14:imgEffect>
+                      <a14:backgroundRemoval t="6122" b="89796" l="0" r="97368">
+                        <a14:foregroundMark x1="72368" y1="24490" x2="0" y2="77551"/>
+                        <a14:foregroundMark x1="84211" y1="20408" x2="97368" y2="6122"/>
+                        <a14:foregroundMark x1="13158" y1="65306" x2="67105" y2="18367"/>
+                        <a14:foregroundMark x1="69737" y1="18367" x2="84211" y2="8163"/>
+                        <a14:foregroundMark x1="89474" y1="24490" x2="2632" y2="83673"/>
+                        <a14:foregroundMark x1="21053" y1="53061" x2="0" y2="69388"/>
+                      </a14:backgroundRemoval>
+                    </a14:imgEffect>
+                  </a14:imgLayer>
+                </a14:imgProps>
+              </a:ext>
+            </a:extLst>
+          </a:blip>
+          <a:stretch>
+            <a:fillRect/>
+          </a:stretch>
+        </p:blipFill>
+        <p:spPr>
+          <a:xfrm rot="10800000">
+            <a:off x="8239844" y="3460043"/>
+            <a:ext cx="723900" cy="466725"/>
+          </a:xfrm>
+          <a:prstGeom prst="rect">
+            <a:avLst/>
+          </a:prstGeom>
+        </p:spPr>
+      </p:pic>
+      <p:pic>
+        <p:nvPicPr>
+          <p:cNvPr id="26" name="圖片 25">
+            <a:extLst>
+              <a:ext uri="{FF2B5EF4-FFF2-40B4-BE49-F238E27FC236}">
+                <a16:creationId xmlns:a16="http://schemas.microsoft.com/office/drawing/2014/main" id="{FFD4E5DE-3382-1027-D7A9-890EA4DB26C7}"/>
+              </a:ext>
+            </a:extLst>
+          </p:cNvPr>
+          <p:cNvPicPr>
+            <a:picLocks noChangeAspect="1"/>
+          </p:cNvPicPr>
+          <p:nvPr/>
+        </p:nvPicPr>
+        <p:blipFill>
+          <a:blip r:embed="rId5">
+            <a:extLst>
+              <a:ext uri="{BEBA8EAE-BF5A-486C-A8C5-ECC9F3942E4B}">
+                <a14:imgProps xmlns:a14="http://schemas.microsoft.com/office/drawing/2010/main">
+                  <a14:imgLayer r:embed="rId6">
+                    <a14:imgEffect>
+                      <a14:backgroundRemoval t="6122" b="89796" l="0" r="97368">
+                        <a14:foregroundMark x1="72368" y1="24490" x2="0" y2="77551"/>
+                        <a14:foregroundMark x1="84211" y1="20408" x2="97368" y2="6122"/>
+                        <a14:foregroundMark x1="13158" y1="65306" x2="67105" y2="18367"/>
+                        <a14:foregroundMark x1="69737" y1="18367" x2="84211" y2="8163"/>
+                        <a14:foregroundMark x1="89474" y1="24490" x2="2632" y2="83673"/>
+                        <a14:foregroundMark x1="21053" y1="53061" x2="0" y2="69388"/>
+                      </a14:backgroundRemoval>
+                    </a14:imgEffect>
+                  </a14:imgLayer>
+                </a14:imgProps>
+              </a:ext>
+            </a:extLst>
+          </a:blip>
+          <a:stretch>
+            <a:fillRect/>
+          </a:stretch>
+        </p:blipFill>
+        <p:spPr>
+          <a:xfrm rot="10800000">
+            <a:off x="8867396" y="3173453"/>
+            <a:ext cx="723900" cy="466725"/>
+          </a:xfrm>
+          <a:prstGeom prst="rect">
+            <a:avLst/>
+          </a:prstGeom>
+        </p:spPr>
+      </p:pic>
+      <p:pic>
+        <p:nvPicPr>
+          <p:cNvPr id="27" name="圖片 26">
+            <a:extLst>
+              <a:ext uri="{FF2B5EF4-FFF2-40B4-BE49-F238E27FC236}">
+                <a16:creationId xmlns:a16="http://schemas.microsoft.com/office/drawing/2014/main" id="{1DB7F903-42E9-D451-B535-FDFE90CF4922}"/>
+              </a:ext>
+            </a:extLst>
+          </p:cNvPr>
+          <p:cNvPicPr>
+            <a:picLocks noChangeAspect="1"/>
+          </p:cNvPicPr>
+          <p:nvPr/>
+        </p:nvPicPr>
+        <p:blipFill>
+          <a:blip r:embed="rId5">
+            <a:extLst>
+              <a:ext uri="{BEBA8EAE-BF5A-486C-A8C5-ECC9F3942E4B}">
+                <a14:imgProps xmlns:a14="http://schemas.microsoft.com/office/drawing/2010/main">
+                  <a14:imgLayer r:embed="rId6">
+                    <a14:imgEffect>
+                      <a14:backgroundRemoval t="6122" b="89796" l="0" r="97368">
+                        <a14:foregroundMark x1="72368" y1="24490" x2="0" y2="77551"/>
+                        <a14:foregroundMark x1="84211" y1="20408" x2="97368" y2="6122"/>
+                        <a14:foregroundMark x1="13158" y1="65306" x2="67105" y2="18367"/>
+                        <a14:foregroundMark x1="69737" y1="18367" x2="84211" y2="8163"/>
+                        <a14:foregroundMark x1="89474" y1="24490" x2="2632" y2="83673"/>
+                        <a14:foregroundMark x1="21053" y1="53061" x2="0" y2="69388"/>
+                      </a14:backgroundRemoval>
+                    </a14:imgEffect>
+                  </a14:imgLayer>
+                </a14:imgProps>
+              </a:ext>
+            </a:extLst>
+          </a:blip>
+          <a:stretch>
+            <a:fillRect/>
+          </a:stretch>
+        </p:blipFill>
+        <p:spPr>
+          <a:xfrm rot="10800000">
+            <a:off x="9020894" y="3106979"/>
+            <a:ext cx="723900" cy="466725"/>
+          </a:xfrm>
+          <a:prstGeom prst="rect">
+            <a:avLst/>
+          </a:prstGeom>
+        </p:spPr>
+      </p:pic>
+      <p:pic>
+        <p:nvPicPr>
+          <p:cNvPr id="29" name="圖片 28">
+            <a:extLst>
+              <a:ext uri="{FF2B5EF4-FFF2-40B4-BE49-F238E27FC236}">
+                <a16:creationId xmlns:a16="http://schemas.microsoft.com/office/drawing/2014/main" id="{94561F81-4738-5A52-4585-5B31FBA74B99}"/>
+              </a:ext>
+            </a:extLst>
+          </p:cNvPr>
+          <p:cNvPicPr>
+            <a:picLocks noChangeAspect="1"/>
+          </p:cNvPicPr>
+          <p:nvPr/>
+        </p:nvPicPr>
+        <p:blipFill>
+          <a:blip r:embed="rId7">
+            <a:extLst>
+              <a:ext uri="{BEBA8EAE-BF5A-486C-A8C5-ECC9F3942E4B}">
+                <a14:imgProps xmlns:a14="http://schemas.microsoft.com/office/drawing/2010/main">
+                  <a14:imgLayer r:embed="rId8">
+                    <a14:imgEffect>
+                      <a14:backgroundRemoval t="11579" b="97895" l="455" r="94091">
+                        <a14:foregroundMark x1="13636" y1="71579" x2="79091" y2="77895"/>
+                        <a14:foregroundMark x1="65000" y1="85263" x2="10909" y2="86842"/>
+                        <a14:foregroundMark x1="9545" y1="67368" x2="10000" y2="92105"/>
+                        <a14:foregroundMark x1="68182" y1="70000" x2="94091" y2="83684"/>
+                        <a14:foregroundMark x1="81818" y1="70000" x2="94545" y2="75789"/>
+                        <a14:foregroundMark x1="85455" y1="68421" x2="92727" y2="70000"/>
+                        <a14:foregroundMark x1="71818" y1="18947" x2="68182" y2="31053"/>
+                        <a14:foregroundMark x1="65909" y1="33684" x2="11818" y2="61579"/>
+                        <a14:foregroundMark x1="49545" y1="52105" x2="31818" y2="56842"/>
+                        <a14:foregroundMark x1="55455" y1="46842" x2="68636" y2="28421"/>
+                        <a14:foregroundMark x1="14545" y1="66842" x2="909" y2="58947"/>
+                        <a14:foregroundMark x1="4091" y1="54211" x2="10455" y2="97895"/>
+                        <a14:foregroundMark x1="11818" y1="82105" x2="73182" y2="87895"/>
+                        <a14:foregroundMark x1="70909" y1="37368" x2="70000" y2="22105"/>
+                        <a14:foregroundMark x1="76364" y1="30000" x2="70000" y2="22105"/>
+                        <a14:foregroundMark x1="66818" y1="18421" x2="74545" y2="23158"/>
+                        <a14:foregroundMark x1="8182" y1="91579" x2="85455" y2="93158"/>
+                        <a14:foregroundMark x1="87273" y1="83158" x2="92273" y2="93158"/>
+                        <a14:foregroundMark x1="79091" y1="65789" x2="92727" y2="68947"/>
+                        <a14:foregroundMark x1="51364" y1="64737" x2="61818" y2="73684"/>
+                        <a14:backgroundMark x1="3636" y1="53158" x2="4091" y2="56842"/>
+                        <a14:backgroundMark x1="9091" y1="56316" x2="5455" y2="52632"/>
+                        <a14:backgroundMark x1="2727" y1="55263" x2="2727" y2="55263"/>
+                        <a14:backgroundMark x1="7273" y1="50000" x2="4091" y2="58947"/>
+                      </a14:backgroundRemoval>
+                    </a14:imgEffect>
+                  </a14:imgLayer>
+                </a14:imgProps>
+              </a:ext>
+            </a:extLst>
+          </a:blip>
+          <a:stretch>
+            <a:fillRect/>
+          </a:stretch>
+        </p:blipFill>
+        <p:spPr>
+          <a:xfrm>
+            <a:off x="9719178" y="2722440"/>
+            <a:ext cx="1706901" cy="1474142"/>
+          </a:xfrm>
+          <a:prstGeom prst="rect">
+            <a:avLst/>
+          </a:prstGeom>
+        </p:spPr>
+      </p:pic>
+      <p:pic>
+        <p:nvPicPr>
+          <p:cNvPr id="31" name="圖片 30">
+            <a:extLst>
+              <a:ext uri="{FF2B5EF4-FFF2-40B4-BE49-F238E27FC236}">
+                <a16:creationId xmlns:a16="http://schemas.microsoft.com/office/drawing/2014/main" id="{6F9C8B43-6125-9060-4177-F5874663C5E6}"/>
+              </a:ext>
+            </a:extLst>
+          </p:cNvPr>
+          <p:cNvPicPr>
+            <a:picLocks noChangeAspect="1"/>
+          </p:cNvPicPr>
+          <p:nvPr/>
+        </p:nvPicPr>
+        <p:blipFill>
+          <a:blip r:embed="rId9"/>
+          <a:stretch>
+            <a:fillRect/>
+          </a:stretch>
+        </p:blipFill>
+        <p:spPr>
+          <a:xfrm rot="1572623">
+            <a:off x="4899126" y="4329215"/>
+            <a:ext cx="209550" cy="180975"/>
+          </a:xfrm>
+          <a:prstGeom prst="rect">
+            <a:avLst/>
+          </a:prstGeom>
+        </p:spPr>
+      </p:pic>
+      <p:pic>
+        <p:nvPicPr>
+          <p:cNvPr id="32" name="圖片 31">
+            <a:extLst>
+              <a:ext uri="{FF2B5EF4-FFF2-40B4-BE49-F238E27FC236}">
+                <a16:creationId xmlns:a16="http://schemas.microsoft.com/office/drawing/2014/main" id="{0A16B569-E774-6F6D-32DD-085DEA07117D}"/>
+              </a:ext>
+            </a:extLst>
+          </p:cNvPr>
+          <p:cNvPicPr>
+            <a:picLocks noChangeAspect="1"/>
+          </p:cNvPicPr>
+          <p:nvPr/>
+        </p:nvPicPr>
+        <p:blipFill>
+          <a:blip r:embed="rId9"/>
+          <a:stretch>
+            <a:fillRect/>
+          </a:stretch>
+        </p:blipFill>
+        <p:spPr>
+          <a:xfrm rot="1572623">
+            <a:off x="4565173" y="4455478"/>
+            <a:ext cx="417850" cy="360870"/>
+          </a:xfrm>
+          <a:prstGeom prst="rect">
+            <a:avLst/>
+          </a:prstGeom>
+        </p:spPr>
+      </p:pic>
+      <p:pic>
+        <p:nvPicPr>
+          <p:cNvPr id="33" name="圖片 32">
+            <a:extLst>
+              <a:ext uri="{FF2B5EF4-FFF2-40B4-BE49-F238E27FC236}">
+                <a16:creationId xmlns:a16="http://schemas.microsoft.com/office/drawing/2014/main" id="{22BF0508-825F-BC92-EA92-72AF18447A03}"/>
+              </a:ext>
+            </a:extLst>
+          </p:cNvPr>
+          <p:cNvPicPr>
+            <a:picLocks noChangeAspect="1"/>
+          </p:cNvPicPr>
+          <p:nvPr/>
+        </p:nvPicPr>
+        <p:blipFill>
+          <a:blip r:embed="rId9"/>
+          <a:stretch>
+            <a:fillRect/>
+          </a:stretch>
+        </p:blipFill>
+        <p:spPr>
+          <a:xfrm rot="1572623">
+            <a:off x="4825724" y="4428615"/>
+            <a:ext cx="209550" cy="180975"/>
+          </a:xfrm>
+          <a:prstGeom prst="rect">
+            <a:avLst/>
+          </a:prstGeom>
+        </p:spPr>
+      </p:pic>
+      <p:pic>
+        <p:nvPicPr>
+          <p:cNvPr id="34" name="圖片 33">
+            <a:extLst>
+              <a:ext uri="{FF2B5EF4-FFF2-40B4-BE49-F238E27FC236}">
+                <a16:creationId xmlns:a16="http://schemas.microsoft.com/office/drawing/2014/main" id="{8E5C7AA7-A92B-B38D-6259-B0C3FA0D82C7}"/>
+              </a:ext>
+            </a:extLst>
+          </p:cNvPr>
+          <p:cNvPicPr>
+            <a:picLocks noChangeAspect="1"/>
+          </p:cNvPicPr>
+          <p:nvPr/>
+        </p:nvPicPr>
+        <p:blipFill>
+          <a:blip r:embed="rId5">
+            <a:extLst>
+              <a:ext uri="{BEBA8EAE-BF5A-486C-A8C5-ECC9F3942E4B}">
+                <a14:imgProps xmlns:a14="http://schemas.microsoft.com/office/drawing/2010/main">
+                  <a14:imgLayer r:embed="rId6">
+                    <a14:imgEffect>
+                      <a14:backgroundRemoval t="6122" b="89796" l="0" r="97368">
+                        <a14:foregroundMark x1="72368" y1="24490" x2="0" y2="77551"/>
+                        <a14:foregroundMark x1="84211" y1="20408" x2="97368" y2="6122"/>
+                        <a14:foregroundMark x1="13158" y1="65306" x2="67105" y2="18367"/>
+                        <a14:foregroundMark x1="69737" y1="18367" x2="84211" y2="8163"/>
+                        <a14:foregroundMark x1="89474" y1="24490" x2="2632" y2="83673"/>
+                        <a14:foregroundMark x1="21053" y1="53061" x2="0" y2="69388"/>
+                      </a14:backgroundRemoval>
+                    </a14:imgEffect>
+                  </a14:imgLayer>
+                </a14:imgProps>
+              </a:ext>
+            </a:extLst>
+          </a:blip>
+          <a:stretch>
+            <a:fillRect/>
+          </a:stretch>
+        </p:blipFill>
+        <p:spPr>
+          <a:xfrm rot="2900611">
+            <a:off x="4300682" y="4269931"/>
+            <a:ext cx="723900" cy="466725"/>
+          </a:xfrm>
+          <a:prstGeom prst="rect">
+            <a:avLst/>
+          </a:prstGeom>
+        </p:spPr>
+      </p:pic>
+      <p:pic>
+        <p:nvPicPr>
+          <p:cNvPr id="36" name="圖片 35">
+            <a:extLst>
+              <a:ext uri="{FF2B5EF4-FFF2-40B4-BE49-F238E27FC236}">
+                <a16:creationId xmlns:a16="http://schemas.microsoft.com/office/drawing/2014/main" id="{36515350-A959-2A90-318D-D44DDC9D44C8}"/>
+              </a:ext>
+            </a:extLst>
+          </p:cNvPr>
+          <p:cNvPicPr>
+            <a:picLocks noChangeAspect="1"/>
+          </p:cNvPicPr>
+          <p:nvPr/>
+        </p:nvPicPr>
+        <p:blipFill>
+          <a:blip r:embed="rId10"/>
+          <a:stretch>
+            <a:fillRect/>
+          </a:stretch>
+        </p:blipFill>
+        <p:spPr>
+          <a:xfrm>
+            <a:off x="5517858" y="4335749"/>
+            <a:ext cx="254768" cy="442430"/>
+          </a:xfrm>
+          <a:prstGeom prst="rect">
+            <a:avLst/>
+          </a:prstGeom>
+        </p:spPr>
+      </p:pic>
+      <p:pic>
+        <p:nvPicPr>
+          <p:cNvPr id="37" name="圖片 36">
+            <a:extLst>
+              <a:ext uri="{FF2B5EF4-FFF2-40B4-BE49-F238E27FC236}">
+                <a16:creationId xmlns:a16="http://schemas.microsoft.com/office/drawing/2014/main" id="{175D617E-21BE-EB11-8EBD-B784ABF70249}"/>
+              </a:ext>
+            </a:extLst>
+          </p:cNvPr>
+          <p:cNvPicPr>
+            <a:picLocks noChangeAspect="1"/>
+          </p:cNvPicPr>
+          <p:nvPr/>
+        </p:nvPicPr>
+        <p:blipFill>
+          <a:blip r:embed="rId10"/>
+          <a:stretch>
+            <a:fillRect/>
+          </a:stretch>
+        </p:blipFill>
+        <p:spPr>
+          <a:xfrm>
+            <a:off x="5910190" y="4335749"/>
+            <a:ext cx="254768" cy="442430"/>
+          </a:xfrm>
+          <a:prstGeom prst="rect">
+            <a:avLst/>
+          </a:prstGeom>
+        </p:spPr>
+      </p:pic>
+      <p:pic>
+        <p:nvPicPr>
+          <p:cNvPr id="39" name="圖片 38">
+            <a:extLst>
+              <a:ext uri="{FF2B5EF4-FFF2-40B4-BE49-F238E27FC236}">
+                <a16:creationId xmlns:a16="http://schemas.microsoft.com/office/drawing/2014/main" id="{19AED03D-584F-2A48-D039-4DCE0F2E5228}"/>
+              </a:ext>
+            </a:extLst>
+          </p:cNvPr>
+          <p:cNvPicPr>
+            <a:picLocks noChangeAspect="1"/>
+          </p:cNvPicPr>
+          <p:nvPr/>
+        </p:nvPicPr>
+        <p:blipFill>
+          <a:blip r:embed="rId11"/>
+          <a:stretch>
+            <a:fillRect/>
+          </a:stretch>
+        </p:blipFill>
+        <p:spPr>
+          <a:xfrm>
+            <a:off x="5883627" y="4031979"/>
+            <a:ext cx="147638" cy="214313"/>
+          </a:xfrm>
+          <a:prstGeom prst="rect">
+            <a:avLst/>
+          </a:prstGeom>
+        </p:spPr>
+      </p:pic>
+      <p:pic>
+        <p:nvPicPr>
+          <p:cNvPr id="40" name="圖片 39">
+            <a:extLst>
+              <a:ext uri="{FF2B5EF4-FFF2-40B4-BE49-F238E27FC236}">
+                <a16:creationId xmlns:a16="http://schemas.microsoft.com/office/drawing/2014/main" id="{44399056-8E16-FED6-9310-712F39F9B1DE}"/>
+              </a:ext>
+            </a:extLst>
+          </p:cNvPr>
+          <p:cNvPicPr>
+            <a:picLocks noChangeAspect="1"/>
+          </p:cNvPicPr>
+          <p:nvPr/>
+        </p:nvPicPr>
+        <p:blipFill>
+          <a:blip r:embed="rId11"/>
+          <a:stretch>
+            <a:fillRect/>
+          </a:stretch>
+        </p:blipFill>
+        <p:spPr>
+          <a:xfrm>
+            <a:off x="5664673" y="4022729"/>
+            <a:ext cx="147638" cy="214313"/>
+          </a:xfrm>
+          <a:prstGeom prst="rect">
+            <a:avLst/>
+          </a:prstGeom>
+        </p:spPr>
+      </p:pic>
+      <p:pic>
+        <p:nvPicPr>
+          <p:cNvPr id="42" name="圖片 41">
+            <a:extLst>
+              <a:ext uri="{FF2B5EF4-FFF2-40B4-BE49-F238E27FC236}">
+                <a16:creationId xmlns:a16="http://schemas.microsoft.com/office/drawing/2014/main" id="{1C793000-C975-E051-43EE-5DF6B92BE064}"/>
+              </a:ext>
+            </a:extLst>
+          </p:cNvPr>
+          <p:cNvPicPr>
+            <a:picLocks noChangeAspect="1"/>
+          </p:cNvPicPr>
+          <p:nvPr/>
+        </p:nvPicPr>
+        <p:blipFill>
+          <a:blip r:embed="rId12"/>
+          <a:stretch>
+            <a:fillRect/>
+          </a:stretch>
+        </p:blipFill>
+        <p:spPr>
+          <a:xfrm>
+            <a:off x="6935495" y="4654354"/>
+            <a:ext cx="171450" cy="123825"/>
+          </a:xfrm>
+          <a:prstGeom prst="rect">
+            <a:avLst/>
+          </a:prstGeom>
+        </p:spPr>
+      </p:pic>
+      <p:pic>
+        <p:nvPicPr>
+          <p:cNvPr id="44" name="圖片 43">
+            <a:extLst>
+              <a:ext uri="{FF2B5EF4-FFF2-40B4-BE49-F238E27FC236}">
+                <a16:creationId xmlns:a16="http://schemas.microsoft.com/office/drawing/2014/main" id="{C9DFA33D-3DD0-6ED2-7B50-B075AD16C7B7}"/>
+              </a:ext>
+            </a:extLst>
+          </p:cNvPr>
+          <p:cNvPicPr>
+            <a:picLocks noChangeAspect="1"/>
+          </p:cNvPicPr>
+          <p:nvPr/>
+        </p:nvPicPr>
+        <p:blipFill>
+          <a:blip r:embed="rId12"/>
+          <a:stretch>
+            <a:fillRect/>
+          </a:stretch>
+        </p:blipFill>
+        <p:spPr>
+          <a:xfrm>
+            <a:off x="7382175" y="6115050"/>
+            <a:ext cx="171450" cy="123825"/>
+          </a:xfrm>
+          <a:prstGeom prst="rect">
+            <a:avLst/>
+          </a:prstGeom>
+        </p:spPr>
+      </p:pic>
+      <p:pic>
+        <p:nvPicPr>
+          <p:cNvPr id="46" name="圖片 45">
+            <a:extLst>
+              <a:ext uri="{FF2B5EF4-FFF2-40B4-BE49-F238E27FC236}">
+                <a16:creationId xmlns:a16="http://schemas.microsoft.com/office/drawing/2014/main" id="{83883946-E301-7DA2-7A96-52AB9E296690}"/>
+              </a:ext>
+            </a:extLst>
+          </p:cNvPr>
+          <p:cNvPicPr>
+            <a:picLocks noChangeAspect="1"/>
+          </p:cNvPicPr>
+          <p:nvPr/>
+        </p:nvPicPr>
+        <p:blipFill>
+          <a:blip r:embed="rId13">
+            <a:extLst>
+              <a:ext uri="{BEBA8EAE-BF5A-486C-A8C5-ECC9F3942E4B}">
+                <a14:imgProps xmlns:a14="http://schemas.microsoft.com/office/drawing/2010/main">
+                  <a14:imgLayer r:embed="rId14">
+                    <a14:imgEffect>
+                      <a14:backgroundRemoval t="10000" b="90000" l="10000" r="90000">
+                        <a14:foregroundMark x1="17361" y1="70866" x2="10417" y2="33858"/>
+                        <a14:foregroundMark x1="72222" y1="63780" x2="83333" y2="76378"/>
+                        <a14:foregroundMark x1="84722" y1="72441" x2="79167" y2="38583"/>
+                        <a14:foregroundMark x1="31944" y1="68504" x2="50694" y2="89764"/>
+                        <a14:foregroundMark x1="27778" y1="55906" x2="15278" y2="37795"/>
+                        <a14:foregroundMark x1="20833" y1="38583" x2="33333" y2="74016"/>
+                        <a14:backgroundMark x1="23611" y1="66929" x2="20833" y2="56693"/>
+                        <a14:backgroundMark x1="22917" y1="59055" x2="18750" y2="51969"/>
+                        <a14:backgroundMark x1="20833" y1="55906" x2="16667" y2="48031"/>
+                        <a14:backgroundMark x1="75000" y1="52756" x2="79861" y2="66142"/>
+                        <a14:backgroundMark x1="69444" y1="62205" x2="81944" y2="81890"/>
+                        <a14:backgroundMark x1="79167" y1="45669" x2="81944" y2="70866"/>
+                      </a14:backgroundRemoval>
+                    </a14:imgEffect>
+                  </a14:imgLayer>
+                </a14:imgProps>
+              </a:ext>
+            </a:extLst>
+          </a:blip>
+          <a:stretch>
+            <a:fillRect/>
+          </a:stretch>
+        </p:blipFill>
+        <p:spPr>
+          <a:xfrm>
+            <a:off x="10596904" y="522315"/>
+            <a:ext cx="1273133" cy="1122833"/>
+          </a:xfrm>
+          <a:prstGeom prst="rect">
+            <a:avLst/>
+          </a:prstGeom>
+        </p:spPr>
+      </p:pic>
+    </p:spTree>
+    <p:extLst>
+      <p:ext uri="{BB962C8B-B14F-4D97-AF65-F5344CB8AC3E}">
+        <p14:creationId xmlns:p14="http://schemas.microsoft.com/office/powerpoint/2010/main" val="2856082807"/>
+      </p:ext>
+    </p:extLst>
+  </p:cSld>
+  <p:clrMapOvr>
+    <a:masterClrMapping/>
+  </p:clrMapOvr>
+  <mc:AlternateContent xmlns:mc="http://schemas.openxmlformats.org/markup-compatibility/2006">
+    <mc:Choice xmlns:p14="http://schemas.microsoft.com/office/powerpoint/2010/main" Requires="p14">
+      <p:transition spd="slow" p14:dur="2000">
+        <p:cut/>
+      </p:transition>
+    </mc:Choice>
+    <mc:Fallback>
+      <p:transition spd="slow">
+        <p:cut/>
+      </p:transition>
+    </mc:Fallback>
+  </mc:AlternateContent>
+</p:sld>
+</file>
+
 <file path=ppt/theme/theme1.xml><?xml version="1.0" encoding="utf-8"?>
 <a:theme xmlns:a="http://schemas.openxmlformats.org/drawingml/2006/main" name="Office 佈景主題">
   <a:themeElements>
@@ -4662,4 +6383,299 @@
     </a:ext>
   </a:extLst>
 </a:theme>
+</file>
+
+<file path=ppt/theme/theme2.xml><?xml version="1.0" encoding="utf-8"?>
+<a:theme xmlns:a="http://schemas.openxmlformats.org/drawingml/2006/main" name="Office 佈景主題">
+  <a:themeElements>
+    <a:clrScheme name="Office">
+      <a:dk1>
+        <a:sysClr val="windowText" lastClr="000000"/>
+      </a:dk1>
+      <a:lt1>
+        <a:sysClr val="window" lastClr="FFFFFF"/>
+      </a:lt1>
+      <a:dk2>
+        <a:srgbClr val="44546A"/>
+      </a:dk2>
+      <a:lt2>
+        <a:srgbClr val="E7E6E6"/>
+      </a:lt2>
+      <a:accent1>
+        <a:srgbClr val="4472C4"/>
+      </a:accent1>
+      <a:accent2>
+        <a:srgbClr val="ED7D31"/>
+      </a:accent2>
+      <a:accent3>
+        <a:srgbClr val="A5A5A5"/>
+      </a:accent3>
+      <a:accent4>
+        <a:srgbClr val="FFC000"/>
+      </a:accent4>
+      <a:accent5>
+        <a:srgbClr val="5B9BD5"/>
+      </a:accent5>
+      <a:accent6>
+        <a:srgbClr val="70AD47"/>
+      </a:accent6>
+      <a:hlink>
+        <a:srgbClr val="0563C1"/>
+      </a:hlink>
+      <a:folHlink>
+        <a:srgbClr val="954F72"/>
+      </a:folHlink>
+    </a:clrScheme>
+    <a:fontScheme name="Office">
+      <a:majorFont>
+        <a:latin typeface="Calibri Light" panose="020F0302020204030204"/>
+        <a:ea typeface=""/>
+        <a:cs typeface=""/>
+        <a:font script="Jpan" typeface="游ゴシック Light"/>
+        <a:font script="Hang" typeface="맑은 고딕"/>
+        <a:font script="Hans" typeface="等线 Light"/>
+        <a:font script="Hant" typeface="新細明體"/>
+        <a:font script="Arab" typeface="Times New Roman"/>
+        <a:font script="Hebr" typeface="Times New Roman"/>
+        <a:font script="Thai" typeface="Angsana New"/>
+        <a:font script="Ethi" typeface="Nyala"/>
+        <a:font script="Beng" typeface="Vrinda"/>
+        <a:font script="Gujr" typeface="Shruti"/>
+        <a:font script="Khmr" typeface="MoolBoran"/>
+        <a:font script="Knda" typeface="Tunga"/>
+        <a:font script="Guru" typeface="Raavi"/>
+        <a:font script="Cans" typeface="Euphemia"/>
+        <a:font script="Cher" typeface="Plantagenet Cherokee"/>
+        <a:font script="Yiii" typeface="Microsoft Yi Baiti"/>
+        <a:font script="Tibt" typeface="Microsoft Himalaya"/>
+        <a:font script="Thaa" typeface="MV Boli"/>
+        <a:font script="Deva" typeface="Mangal"/>
+        <a:font script="Telu" typeface="Gautami"/>
+        <a:font script="Taml" typeface="Latha"/>
+        <a:font script="Syrc" typeface="Estrangelo Edessa"/>
+        <a:font script="Orya" typeface="Kalinga"/>
+        <a:font script="Mlym" typeface="Kartika"/>
+        <a:font script="Laoo" typeface="DokChampa"/>
+        <a:font script="Sinh" typeface="Iskoola Pota"/>
+        <a:font script="Mong" typeface="Mongolian Baiti"/>
+        <a:font script="Viet" typeface="Times New Roman"/>
+        <a:font script="Uigh" typeface="Microsoft Uighur"/>
+        <a:font script="Geor" typeface="Sylfaen"/>
+        <a:font script="Armn" typeface="Arial"/>
+        <a:font script="Bugi" typeface="Leelawadee UI"/>
+        <a:font script="Bopo" typeface="Microsoft JhengHei"/>
+        <a:font script="Java" typeface="Javanese Text"/>
+        <a:font script="Lisu" typeface="Segoe UI"/>
+        <a:font script="Mymr" typeface="Myanmar Text"/>
+        <a:font script="Nkoo" typeface="Ebrima"/>
+        <a:font script="Olck" typeface="Nirmala UI"/>
+        <a:font script="Osma" typeface="Ebrima"/>
+        <a:font script="Phag" typeface="Phagspa"/>
+        <a:font script="Syrn" typeface="Estrangelo Edessa"/>
+        <a:font script="Syrj" typeface="Estrangelo Edessa"/>
+        <a:font script="Syre" typeface="Estrangelo Edessa"/>
+        <a:font script="Sora" typeface="Nirmala UI"/>
+        <a:font script="Tale" typeface="Microsoft Tai Le"/>
+        <a:font script="Talu" typeface="Microsoft New Tai Lue"/>
+        <a:font script="Tfng" typeface="Ebrima"/>
+      </a:majorFont>
+      <a:minorFont>
+        <a:latin typeface="Calibri" panose="020F0502020204030204"/>
+        <a:ea typeface=""/>
+        <a:cs typeface=""/>
+        <a:font script="Jpan" typeface="游ゴシック"/>
+        <a:font script="Hang" typeface="맑은 고딕"/>
+        <a:font script="Hans" typeface="等线"/>
+        <a:font script="Hant" typeface="新細明體"/>
+        <a:font script="Arab" typeface="Arial"/>
+        <a:font script="Hebr" typeface="Arial"/>
+        <a:font script="Thai" typeface="Cordia New"/>
+        <a:font script="Ethi" typeface="Nyala"/>
+        <a:font script="Beng" typeface="Vrinda"/>
+        <a:font script="Gujr" typeface="Shruti"/>
+        <a:font script="Khmr" typeface="DaunPenh"/>
+        <a:font script="Knda" typeface="Tunga"/>
+        <a:font script="Guru" typeface="Raavi"/>
+        <a:font script="Cans" typeface="Euphemia"/>
+        <a:font script="Cher" typeface="Plantagenet Cherokee"/>
+        <a:font script="Yiii" typeface="Microsoft Yi Baiti"/>
+        <a:font script="Tibt" typeface="Microsoft Himalaya"/>
+        <a:font script="Thaa" typeface="MV Boli"/>
+        <a:font script="Deva" typeface="Mangal"/>
+        <a:font script="Telu" typeface="Gautami"/>
+        <a:font script="Taml" typeface="Latha"/>
+        <a:font script="Syrc" typeface="Estrangelo Edessa"/>
+        <a:font script="Orya" typeface="Kalinga"/>
+        <a:font script="Mlym" typeface="Kartika"/>
+        <a:font script="Laoo" typeface="DokChampa"/>
+        <a:font script="Sinh" typeface="Iskoola Pota"/>
+        <a:font script="Mong" typeface="Mongolian Baiti"/>
+        <a:font script="Viet" typeface="Arial"/>
+        <a:font script="Uigh" typeface="Microsoft Uighur"/>
+        <a:font script="Geor" typeface="Sylfaen"/>
+        <a:font script="Armn" typeface="Arial"/>
+        <a:font script="Bugi" typeface="Leelawadee UI"/>
+        <a:font script="Bopo" typeface="Microsoft JhengHei"/>
+        <a:font script="Java" typeface="Javanese Text"/>
+        <a:font script="Lisu" typeface="Segoe UI"/>
+        <a:font script="Mymr" typeface="Myanmar Text"/>
+        <a:font script="Nkoo" typeface="Ebrima"/>
+        <a:font script="Olck" typeface="Nirmala UI"/>
+        <a:font script="Osma" typeface="Ebrima"/>
+        <a:font script="Phag" typeface="Phagspa"/>
+        <a:font script="Syrn" typeface="Estrangelo Edessa"/>
+        <a:font script="Syrj" typeface="Estrangelo Edessa"/>
+        <a:font script="Syre" typeface="Estrangelo Edessa"/>
+        <a:font script="Sora" typeface="Nirmala UI"/>
+        <a:font script="Tale" typeface="Microsoft Tai Le"/>
+        <a:font script="Talu" typeface="Microsoft New Tai Lue"/>
+        <a:font script="Tfng" typeface="Ebrima"/>
+      </a:minorFont>
+    </a:fontScheme>
+    <a:fmtScheme name="Office">
+      <a:fillStyleLst>
+        <a:solidFill>
+          <a:schemeClr val="phClr"/>
+        </a:solidFill>
+        <a:gradFill rotWithShape="1">
+          <a:gsLst>
+            <a:gs pos="0">
+              <a:schemeClr val="phClr">
+                <a:lumMod val="110000"/>
+                <a:satMod val="105000"/>
+                <a:tint val="67000"/>
+              </a:schemeClr>
+            </a:gs>
+            <a:gs pos="50000">
+              <a:schemeClr val="phClr">
+                <a:lumMod val="105000"/>
+                <a:satMod val="103000"/>
+                <a:tint val="73000"/>
+              </a:schemeClr>
+            </a:gs>
+            <a:gs pos="100000">
+              <a:schemeClr val="phClr">
+                <a:lumMod val="105000"/>
+                <a:satMod val="109000"/>
+                <a:tint val="81000"/>
+              </a:schemeClr>
+            </a:gs>
+          </a:gsLst>
+          <a:lin ang="5400000" scaled="0"/>
+        </a:gradFill>
+        <a:gradFill rotWithShape="1">
+          <a:gsLst>
+            <a:gs pos="0">
+              <a:schemeClr val="phClr">
+                <a:satMod val="103000"/>
+                <a:lumMod val="102000"/>
+                <a:tint val="94000"/>
+              </a:schemeClr>
+            </a:gs>
+            <a:gs pos="50000">
+              <a:schemeClr val="phClr">
+                <a:satMod val="110000"/>
+                <a:lumMod val="100000"/>
+                <a:shade val="100000"/>
+              </a:schemeClr>
+            </a:gs>
+            <a:gs pos="100000">
+              <a:schemeClr val="phClr">
+                <a:lumMod val="99000"/>
+                <a:satMod val="120000"/>
+                <a:shade val="78000"/>
+              </a:schemeClr>
+            </a:gs>
+          </a:gsLst>
+          <a:lin ang="5400000" scaled="0"/>
+        </a:gradFill>
+      </a:fillStyleLst>
+      <a:lnStyleLst>
+        <a:ln w="6350" cap="flat" cmpd="sng" algn="ctr">
+          <a:solidFill>
+            <a:schemeClr val="phClr"/>
+          </a:solidFill>
+          <a:prstDash val="solid"/>
+          <a:miter lim="800000"/>
+        </a:ln>
+        <a:ln w="12700" cap="flat" cmpd="sng" algn="ctr">
+          <a:solidFill>
+            <a:schemeClr val="phClr"/>
+          </a:solidFill>
+          <a:prstDash val="solid"/>
+          <a:miter lim="800000"/>
+        </a:ln>
+        <a:ln w="19050" cap="flat" cmpd="sng" algn="ctr">
+          <a:solidFill>
+            <a:schemeClr val="phClr"/>
+          </a:solidFill>
+          <a:prstDash val="solid"/>
+          <a:miter lim="800000"/>
+        </a:ln>
+      </a:lnStyleLst>
+      <a:effectStyleLst>
+        <a:effectStyle>
+          <a:effectLst/>
+        </a:effectStyle>
+        <a:effectStyle>
+          <a:effectLst/>
+        </a:effectStyle>
+        <a:effectStyle>
+          <a:effectLst>
+            <a:outerShdw blurRad="57150" dist="19050" dir="5400000" algn="ctr" rotWithShape="0">
+              <a:srgbClr val="000000">
+                <a:alpha val="63000"/>
+              </a:srgbClr>
+            </a:outerShdw>
+          </a:effectLst>
+        </a:effectStyle>
+      </a:effectStyleLst>
+      <a:bgFillStyleLst>
+        <a:solidFill>
+          <a:schemeClr val="phClr"/>
+        </a:solidFill>
+        <a:solidFill>
+          <a:schemeClr val="phClr">
+            <a:tint val="95000"/>
+            <a:satMod val="170000"/>
+          </a:schemeClr>
+        </a:solidFill>
+        <a:gradFill rotWithShape="1">
+          <a:gsLst>
+            <a:gs pos="0">
+              <a:schemeClr val="phClr">
+                <a:tint val="93000"/>
+                <a:satMod val="150000"/>
+                <a:shade val="98000"/>
+                <a:lumMod val="102000"/>
+              </a:schemeClr>
+            </a:gs>
+            <a:gs pos="50000">
+              <a:schemeClr val="phClr">
+                <a:tint val="98000"/>
+                <a:satMod val="130000"/>
+                <a:shade val="90000"/>
+                <a:lumMod val="103000"/>
+              </a:schemeClr>
+            </a:gs>
+            <a:gs pos="100000">
+              <a:schemeClr val="phClr">
+                <a:shade val="63000"/>
+                <a:satMod val="120000"/>
+              </a:schemeClr>
+            </a:gs>
+          </a:gsLst>
+          <a:lin ang="5400000" scaled="0"/>
+        </a:gradFill>
+      </a:bgFillStyleLst>
+    </a:fmtScheme>
+  </a:themeElements>
+  <a:objectDefaults/>
+  <a:extraClrSchemeLst/>
+  <a:extLst>
+    <a:ext uri="{05A4C25C-085E-4340-85A3-A5531E510DB2}">
+      <thm15:themeFamily xmlns:thm15="http://schemas.microsoft.com/office/thememl/2012/main" name="Office Theme" id="{62F939B6-93AF-4DB8-9C6B-D6C7DFDC589F}" vid="{4A3C46E8-61CC-4603-A589-7422A47A8E4A}"/>
+    </a:ext>
+  </a:extLst>
+</a:theme>
 </file>